--- a/templates/conference_template.pptx
+++ b/templates/conference_template.pptx
@@ -275,7 +275,7 @@
           <a:p>
             <a:fld id="{E8CF71B8-DF2A-2E41-BE66-2E18A767DA8A}" type="datetimeFigureOut">
               <a:rPr lang="en-US" smtClean="0"/>
-              <a:t>12/29/25</a:t>
+              <a:t>1/15/2026</a:t>
             </a:fld>
             <a:endParaRPr lang="en-US"/>
           </a:p>
@@ -440,7 +440,7 @@
           <a:p>
             <a:fld id="{0DD60A27-BF12-6744-9E93-932A0E34D8BB}" type="datetimeFigureOut">
               <a:rPr lang="en-US" smtClean="0"/>
-              <a:t>12/29/25</a:t>
+              <a:t>1/15/2026</a:t>
             </a:fld>
             <a:endParaRPr lang="en-US"/>
           </a:p>
@@ -7973,23 +7973,23 @@
       </p:sp>
       <p:sp>
         <p:nvSpPr>
-          <p:cNvPr id="5" name="矩形 4"/>
+          <p:cNvPr id="6" name="矩形 5"/>
           <p:cNvSpPr/>
           <p:nvPr/>
         </p:nvSpPr>
         <p:spPr>
           <a:xfrm>
-            <a:off x="420370" y="1659890"/>
-            <a:ext cx="9787890" cy="561340"/>
+            <a:off x="420370" y="2276475"/>
+            <a:ext cx="11452225" cy="782320"/>
           </a:xfrm>
           <a:prstGeom prst="rect">
             <a:avLst/>
           </a:prstGeom>
-          <a:solidFill>
-            <a:schemeClr val="tx2"/>
-          </a:solidFill>
+          <a:noFill/>
           <a:ln>
-            <a:noFill/>
+            <a:solidFill>
+              <a:srgbClr val="2B632C"/>
+            </a:solidFill>
           </a:ln>
         </p:spPr>
         <p:style>
@@ -8009,41 +8009,37 @@
           </a:fontRef>
         </p:style>
         <p:txBody>
-          <a:bodyPr rtlCol="0" anchor="t" anchorCtr="0"/>
+          <a:bodyPr rtlCol="0" anchor="ctr"/>
           <a:lstStyle/>
           <a:p>
-            <a:r>
-              <a:rPr kumimoji="1" lang="en-US" altLang="zh-CN" sz="1200" dirty="0" err="1">
-                <a:solidFill>
-                  <a:schemeClr val="tx1"/>
-                </a:solidFill>
-                <a:latin typeface="微软雅黑" panose="020B0503020204020204" pitchFamily="34" charset="-122"/>
-                <a:ea typeface="微软雅黑" panose="020B0503020204020204" pitchFamily="34" charset="-122"/>
-              </a:rPr>
-              <a:t>keynote_abstract</a:t>
-            </a:r>
-          </a:p>
-        </p:txBody>
-      </p:sp>
-      <p:sp>
-        <p:nvSpPr>
-          <p:cNvPr id="6" name="矩形 5"/>
+            <a:pPr algn="ctr"/>
+            <a:endParaRPr kumimoji="1" lang="zh-CN" altLang="en-US">
+              <a:solidFill>
+                <a:schemeClr val="tx1"/>
+              </a:solidFill>
+            </a:endParaRPr>
+          </a:p>
+        </p:txBody>
+      </p:sp>
+      <p:sp>
+        <p:nvSpPr>
+          <p:cNvPr id="7" name="矩形 6"/>
           <p:cNvSpPr/>
           <p:nvPr/>
         </p:nvSpPr>
         <p:spPr>
           <a:xfrm>
-            <a:off x="420370" y="2276475"/>
-            <a:ext cx="11452225" cy="782320"/>
+            <a:off x="5993765" y="2147570"/>
+            <a:ext cx="774065" cy="248920"/>
           </a:xfrm>
           <a:prstGeom prst="rect">
             <a:avLst/>
           </a:prstGeom>
-          <a:noFill/>
+          <a:solidFill>
+            <a:schemeClr val="tx2"/>
+          </a:solidFill>
           <a:ln>
-            <a:solidFill>
-              <a:srgbClr val="2B632C"/>
-            </a:solidFill>
+            <a:noFill/>
           </a:ln>
         </p:spPr>
         <p:style>
@@ -8063,37 +8059,42 @@
           </a:fontRef>
         </p:style>
         <p:txBody>
-          <a:bodyPr rtlCol="0" anchor="ctr"/>
+          <a:bodyPr vert="horz" rtlCol="0" anchor="ctr"/>
           <a:lstStyle/>
           <a:p>
             <a:pPr algn="ctr"/>
-            <a:endParaRPr kumimoji="1" lang="zh-CN" altLang="en-US">
-              <a:solidFill>
-                <a:schemeClr val="tx1"/>
-              </a:solidFill>
-            </a:endParaRPr>
-          </a:p>
-        </p:txBody>
-      </p:sp>
-      <p:sp>
-        <p:nvSpPr>
-          <p:cNvPr id="7" name="矩形 6"/>
+            <a:r>
+              <a:rPr kumimoji="1" lang="en-US" altLang="zh-CN" sz="1200" b="1" dirty="0">
+                <a:solidFill>
+                  <a:schemeClr val="tx1"/>
+                </a:solidFill>
+                <a:latin typeface="微软雅黑" panose="020B0503020204020204" pitchFamily="34" charset="-122"/>
+                <a:ea typeface="微软雅黑" panose="020B0503020204020204" pitchFamily="34" charset="-122"/>
+              </a:rPr>
+              <a:t>Why</a:t>
+            </a:r>
+          </a:p>
+        </p:txBody>
+      </p:sp>
+      <p:sp>
+        <p:nvSpPr>
+          <p:cNvPr id="22" name="矩形 21"/>
           <p:cNvSpPr/>
           <p:nvPr/>
         </p:nvSpPr>
         <p:spPr>
           <a:xfrm>
-            <a:off x="5993765" y="2147570"/>
-            <a:ext cx="774065" cy="248920"/>
+            <a:off x="420128" y="3184790"/>
+            <a:ext cx="11453375" cy="782216"/>
           </a:xfrm>
           <a:prstGeom prst="rect">
             <a:avLst/>
           </a:prstGeom>
-          <a:solidFill>
-            <a:schemeClr val="tx2"/>
-          </a:solidFill>
+          <a:noFill/>
           <a:ln>
-            <a:noFill/>
+            <a:solidFill>
+              <a:srgbClr val="2B632C"/>
+            </a:solidFill>
           </a:ln>
         </p:spPr>
         <p:style>
@@ -8113,10 +8114,60 @@
           </a:fontRef>
         </p:style>
         <p:txBody>
-          <a:bodyPr vert="horz" rtlCol="0" anchor="ctr"/>
+          <a:bodyPr rtlCol="0" anchor="ctr"/>
           <a:lstStyle/>
           <a:p>
             <a:pPr algn="ctr"/>
+            <a:endParaRPr kumimoji="1" lang="zh-CN" altLang="en-US">
+              <a:solidFill>
+                <a:schemeClr val="tx1"/>
+              </a:solidFill>
+            </a:endParaRPr>
+          </a:p>
+        </p:txBody>
+      </p:sp>
+      <p:sp>
+        <p:nvSpPr>
+          <p:cNvPr id="23" name="矩形 22"/>
+          <p:cNvSpPr/>
+          <p:nvPr/>
+        </p:nvSpPr>
+        <p:spPr>
+          <a:xfrm>
+            <a:off x="6024092" y="3099172"/>
+            <a:ext cx="743738" cy="248669"/>
+          </a:xfrm>
+          <a:prstGeom prst="rect">
+            <a:avLst/>
+          </a:prstGeom>
+          <a:solidFill>
+            <a:schemeClr val="tx2"/>
+          </a:solidFill>
+          <a:ln>
+            <a:noFill/>
+          </a:ln>
+        </p:spPr>
+        <p:style>
+          <a:lnRef idx="2">
+            <a:schemeClr val="accent1">
+              <a:shade val="50000"/>
+            </a:schemeClr>
+          </a:lnRef>
+          <a:fillRef idx="1">
+            <a:schemeClr val="accent1"/>
+          </a:fillRef>
+          <a:effectRef idx="0">
+            <a:schemeClr val="accent1"/>
+          </a:effectRef>
+          <a:fontRef idx="minor">
+            <a:schemeClr val="lt1"/>
+          </a:fontRef>
+        </p:style>
+        <p:txBody>
+          <a:bodyPr rtlCol="0" anchor="ctr"/>
+          <a:lstStyle/>
+          <a:p>
+            <a:pPr algn="ctr"/>
             <a:r>
               <a:rPr kumimoji="1" lang="en-US" altLang="zh-CN" sz="1200" b="1" dirty="0">
                 <a:solidFill>
@@ -8125,7 +8176,622 @@
                 <a:latin typeface="微软雅黑" panose="020B0503020204020204" pitchFamily="34" charset="-122"/>
                 <a:ea typeface="微软雅黑" panose="020B0503020204020204" pitchFamily="34" charset="-122"/>
               </a:rPr>
-              <a:t>Why</a:t>
+              <a:t>What</a:t>
+            </a:r>
+          </a:p>
+        </p:txBody>
+      </p:sp>
+      <p:sp>
+        <p:nvSpPr>
+          <p:cNvPr id="25" name="矩形 24"/>
+          <p:cNvSpPr/>
+          <p:nvPr/>
+        </p:nvSpPr>
+        <p:spPr>
+          <a:xfrm>
+            <a:off x="420129" y="4089941"/>
+            <a:ext cx="11453374" cy="782216"/>
+          </a:xfrm>
+          <a:prstGeom prst="rect">
+            <a:avLst/>
+          </a:prstGeom>
+          <a:noFill/>
+          <a:ln>
+            <a:solidFill>
+              <a:srgbClr val="2B632C"/>
+            </a:solidFill>
+          </a:ln>
+        </p:spPr>
+        <p:style>
+          <a:lnRef idx="2">
+            <a:schemeClr val="accent1">
+              <a:shade val="50000"/>
+            </a:schemeClr>
+          </a:lnRef>
+          <a:fillRef idx="1">
+            <a:schemeClr val="accent1"/>
+          </a:fillRef>
+          <a:effectRef idx="0">
+            <a:schemeClr val="accent1"/>
+          </a:effectRef>
+          <a:fontRef idx="minor">
+            <a:schemeClr val="lt1"/>
+          </a:fontRef>
+        </p:style>
+        <p:txBody>
+          <a:bodyPr rtlCol="0" anchor="ctr"/>
+          <a:lstStyle/>
+          <a:p>
+            <a:pPr algn="ctr"/>
+            <a:endParaRPr kumimoji="1" lang="zh-CN" altLang="en-US">
+              <a:solidFill>
+                <a:schemeClr val="tx1"/>
+              </a:solidFill>
+            </a:endParaRPr>
+          </a:p>
+        </p:txBody>
+      </p:sp>
+      <p:sp>
+        <p:nvSpPr>
+          <p:cNvPr id="26" name="矩形 25"/>
+          <p:cNvSpPr/>
+          <p:nvPr/>
+        </p:nvSpPr>
+        <p:spPr>
+          <a:xfrm>
+            <a:off x="6024092" y="3994163"/>
+            <a:ext cx="743738" cy="248669"/>
+          </a:xfrm>
+          <a:prstGeom prst="rect">
+            <a:avLst/>
+          </a:prstGeom>
+          <a:solidFill>
+            <a:schemeClr val="tx2"/>
+          </a:solidFill>
+          <a:ln>
+            <a:noFill/>
+          </a:ln>
+        </p:spPr>
+        <p:style>
+          <a:lnRef idx="2">
+            <a:schemeClr val="accent1">
+              <a:shade val="50000"/>
+            </a:schemeClr>
+          </a:lnRef>
+          <a:fillRef idx="1">
+            <a:schemeClr val="accent1"/>
+          </a:fillRef>
+          <a:effectRef idx="0">
+            <a:schemeClr val="accent1"/>
+          </a:effectRef>
+          <a:fontRef idx="minor">
+            <a:schemeClr val="lt1"/>
+          </a:fontRef>
+        </p:style>
+        <p:txBody>
+          <a:bodyPr rtlCol="0" anchor="ctr"/>
+          <a:lstStyle/>
+          <a:p>
+            <a:pPr algn="ctr"/>
+            <a:r>
+              <a:rPr kumimoji="1" lang="en-US" altLang="zh-CN" sz="1200" b="1" dirty="0">
+                <a:solidFill>
+                  <a:schemeClr val="tx1"/>
+                </a:solidFill>
+                <a:latin typeface="微软雅黑" panose="020B0503020204020204" pitchFamily="34" charset="-122"/>
+                <a:ea typeface="微软雅黑" panose="020B0503020204020204" pitchFamily="34" charset="-122"/>
+              </a:rPr>
+              <a:t>How</a:t>
+            </a:r>
+          </a:p>
+        </p:txBody>
+      </p:sp>
+      <p:sp>
+        <p:nvSpPr>
+          <p:cNvPr id="28" name="矩形 27"/>
+          <p:cNvSpPr/>
+          <p:nvPr/>
+        </p:nvSpPr>
+        <p:spPr>
+          <a:xfrm>
+            <a:off x="420130" y="4932994"/>
+            <a:ext cx="2923961" cy="259292"/>
+          </a:xfrm>
+          <a:prstGeom prst="rect">
+            <a:avLst/>
+          </a:prstGeom>
+          <a:noFill/>
+          <a:ln>
+            <a:noFill/>
+          </a:ln>
+        </p:spPr>
+        <p:style>
+          <a:lnRef idx="2">
+            <a:schemeClr val="accent1">
+              <a:shade val="50000"/>
+            </a:schemeClr>
+          </a:lnRef>
+          <a:fillRef idx="1">
+            <a:schemeClr val="accent1"/>
+          </a:fillRef>
+          <a:effectRef idx="0">
+            <a:schemeClr val="accent1"/>
+          </a:effectRef>
+          <a:fontRef idx="minor">
+            <a:schemeClr val="lt1"/>
+          </a:fontRef>
+        </p:style>
+        <p:txBody>
+          <a:bodyPr rtlCol="0" anchor="ctr"/>
+          <a:lstStyle/>
+          <a:p>
+            <a:r>
+              <a:rPr kumimoji="1" lang="zh-CN" altLang="en-US" sz="1400" b="1" dirty="0">
+                <a:solidFill>
+                  <a:schemeClr val="tx1"/>
+                </a:solidFill>
+                <a:latin typeface="微软雅黑" panose="020B0503020204020204" pitchFamily="34" charset="-122"/>
+                <a:ea typeface="微软雅黑" panose="020B0503020204020204" pitchFamily="34" charset="-122"/>
+              </a:rPr>
+              <a:t>业务启发：</a:t>
+            </a:r>
+          </a:p>
+        </p:txBody>
+      </p:sp>
+      <p:sp>
+        <p:nvSpPr>
+          <p:cNvPr id="29" name="矩形 28"/>
+          <p:cNvSpPr/>
+          <p:nvPr/>
+        </p:nvSpPr>
+        <p:spPr>
+          <a:xfrm>
+            <a:off x="414384" y="5181663"/>
+            <a:ext cx="11453374" cy="714679"/>
+          </a:xfrm>
+          <a:prstGeom prst="rect">
+            <a:avLst/>
+          </a:prstGeom>
+          <a:solidFill>
+            <a:schemeClr val="tx2"/>
+          </a:solidFill>
+          <a:ln>
+            <a:noFill/>
+          </a:ln>
+        </p:spPr>
+        <p:style>
+          <a:lnRef idx="2">
+            <a:schemeClr val="accent1">
+              <a:shade val="50000"/>
+            </a:schemeClr>
+          </a:lnRef>
+          <a:fillRef idx="1">
+            <a:schemeClr val="accent1"/>
+          </a:fillRef>
+          <a:effectRef idx="0">
+            <a:schemeClr val="accent1"/>
+          </a:effectRef>
+          <a:fontRef idx="minor">
+            <a:schemeClr val="lt1"/>
+          </a:fontRef>
+        </p:style>
+        <p:txBody>
+          <a:bodyPr rtlCol="0" anchor="t" anchorCtr="0"/>
+          <a:lstStyle/>
+          <a:p>
+            <a:r>
+              <a:rPr kumimoji="1" lang="en-US" altLang="zh-CN" sz="1200" dirty="0" err="1">
+                <a:solidFill>
+                  <a:schemeClr val="tx1"/>
+                </a:solidFill>
+                <a:latin typeface="微软雅黑" panose="020B0503020204020204" pitchFamily="34" charset="-122"/>
+                <a:ea typeface="微软雅黑" panose="020B0503020204020204" pitchFamily="34" charset="-122"/>
+              </a:rPr>
+              <a:t>keynote_inspiration</a:t>
+            </a:r>
+          </a:p>
+        </p:txBody>
+      </p:sp>
+      <p:sp>
+        <p:nvSpPr>
+          <p:cNvPr id="30" name="矩形 29"/>
+          <p:cNvSpPr/>
+          <p:nvPr/>
+        </p:nvSpPr>
+        <p:spPr>
+          <a:xfrm>
+            <a:off x="10447020" y="529590"/>
+            <a:ext cx="1440000" cy="1440000"/>
+          </a:xfrm>
+          <a:prstGeom prst="rect">
+            <a:avLst/>
+          </a:prstGeom>
+          <a:solidFill>
+            <a:schemeClr val="tx2"/>
+          </a:solidFill>
+          <a:ln>
+            <a:noFill/>
+          </a:ln>
+        </p:spPr>
+        <p:style>
+          <a:lnRef idx="2">
+            <a:schemeClr val="accent1">
+              <a:shade val="50000"/>
+            </a:schemeClr>
+          </a:lnRef>
+          <a:fillRef idx="1">
+            <a:schemeClr val="accent1"/>
+          </a:fillRef>
+          <a:effectRef idx="0">
+            <a:schemeClr val="accent1"/>
+          </a:effectRef>
+          <a:fontRef idx="minor">
+            <a:schemeClr val="lt1"/>
+          </a:fontRef>
+        </p:style>
+        <p:txBody>
+          <a:bodyPr rtlCol="0" anchor="t" anchorCtr="0"/>
+          <a:lstStyle/>
+          <a:p>
+            <a:r>
+              <a:rPr kumimoji="1" lang="en-US" altLang="zh-CN" sz="1200" dirty="0" err="1">
+                <a:solidFill>
+                  <a:schemeClr val="tx1"/>
+                </a:solidFill>
+                <a:latin typeface="微软雅黑" panose="020B0503020204020204" pitchFamily="34" charset="-122"/>
+                <a:ea typeface="微软雅黑" panose="020B0503020204020204" pitchFamily="34" charset="-122"/>
+              </a:rPr>
+              <a:t>keynote_picture</a:t>
+            </a:r>
+          </a:p>
+        </p:txBody>
+      </p:sp>
+      <p:sp>
+        <p:nvSpPr>
+          <p:cNvPr id="16" name="矩形 15"/>
+          <p:cNvSpPr/>
+          <p:nvPr/>
+        </p:nvSpPr>
+        <p:spPr>
+          <a:xfrm>
+            <a:off x="415290" y="6015990"/>
+            <a:ext cx="11463020" cy="589915"/>
+          </a:xfrm>
+          <a:prstGeom prst="rect">
+            <a:avLst/>
+          </a:prstGeom>
+          <a:solidFill>
+            <a:srgbClr val="78000F"/>
+          </a:solidFill>
+          <a:ln>
+            <a:noFill/>
+          </a:ln>
+        </p:spPr>
+        <p:style>
+          <a:lnRef idx="2">
+            <a:schemeClr val="accent1">
+              <a:shade val="50000"/>
+            </a:schemeClr>
+          </a:lnRef>
+          <a:fillRef idx="1">
+            <a:schemeClr val="accent1"/>
+          </a:fillRef>
+          <a:effectRef idx="0">
+            <a:schemeClr val="accent1"/>
+          </a:effectRef>
+          <a:fontRef idx="minor">
+            <a:schemeClr val="lt1"/>
+          </a:fontRef>
+        </p:style>
+        <p:txBody>
+          <a:bodyPr rtlCol="0" anchor="t" anchorCtr="0"/>
+          <a:lstStyle/>
+          <a:p>
+            <a:r>
+              <a:rPr kumimoji="1" lang="en-US" altLang="zh-CN" sz="1200" dirty="0" err="1">
+                <a:solidFill>
+                  <a:schemeClr val="tx2"/>
+                </a:solidFill>
+                <a:latin typeface="微软雅黑" panose="020B0503020204020204" pitchFamily="34" charset="-122"/>
+                <a:ea typeface="微软雅黑" panose="020B0503020204020204" pitchFamily="34" charset="-122"/>
+              </a:rPr>
+              <a:t>keynote_summary</a:t>
+            </a:r>
+            <a:endParaRPr kumimoji="1" lang="en-US" altLang="zh-CN" sz="1200" dirty="0">
+              <a:solidFill>
+                <a:schemeClr val="tx2"/>
+              </a:solidFill>
+              <a:latin typeface="微软雅黑" panose="020B0503020204020204" pitchFamily="34" charset="-122"/>
+              <a:ea typeface="微软雅黑" panose="020B0503020204020204" pitchFamily="34" charset="-122"/>
+            </a:endParaRPr>
+          </a:p>
+        </p:txBody>
+      </p:sp>
+      <p:sp>
+        <p:nvSpPr>
+          <p:cNvPr id="17" name="矩形 16"/>
+          <p:cNvSpPr/>
+          <p:nvPr/>
+        </p:nvSpPr>
+        <p:spPr>
+          <a:xfrm>
+            <a:off x="6095365" y="25400"/>
+            <a:ext cx="1198800" cy="216000"/>
+          </a:xfrm>
+          <a:prstGeom prst="rect">
+            <a:avLst/>
+          </a:prstGeom>
+          <a:solidFill>
+            <a:srgbClr val="B0B0B0"/>
+          </a:solidFill>
+          <a:ln>
+            <a:noFill/>
+          </a:ln>
+        </p:spPr>
+        <p:style>
+          <a:lnRef idx="2">
+            <a:schemeClr val="accent1">
+              <a:shade val="50000"/>
+            </a:schemeClr>
+          </a:lnRef>
+          <a:fillRef idx="1">
+            <a:schemeClr val="accent1"/>
+          </a:fillRef>
+          <a:effectRef idx="0">
+            <a:schemeClr val="accent1"/>
+          </a:effectRef>
+          <a:fontRef idx="minor">
+            <a:schemeClr val="lt1"/>
+          </a:fontRef>
+        </p:style>
+        <p:txBody>
+          <a:bodyPr vertOverflow="overflow" horzOverflow="overflow" vert="horz" wrap="square" numCol="1" spcCol="0" rtlCol="0" fromWordArt="0" anchor="ctr" anchorCtr="0" forceAA="0" compatLnSpc="1">
+            <a:noAutofit/>
+          </a:bodyPr>
+          <a:lstStyle/>
+          <a:p>
+            <a:pPr lvl="0" algn="ctr">
+              <a:buClrTx/>
+              <a:buSzTx/>
+              <a:buFontTx/>
+            </a:pPr>
+            <a:r>
+              <a:rPr lang="zh-CN" altLang="en-US" sz="1200" b="1">
+                <a:solidFill>
+                  <a:schemeClr val="tx2"/>
+                </a:solidFill>
+                <a:latin typeface="微软雅黑" panose="020B0503020204020204" pitchFamily="34" charset="-122"/>
+                <a:ea typeface="微软雅黑" panose="020B0503020204020204" pitchFamily="34" charset="-122"/>
+                <a:sym typeface="+mn-ea"/>
+              </a:rPr>
+              <a:t>会议概览</a:t>
+            </a:r>
+          </a:p>
+        </p:txBody>
+      </p:sp>
+      <p:sp>
+        <p:nvSpPr>
+          <p:cNvPr id="18" name="矩形 17"/>
+          <p:cNvSpPr/>
+          <p:nvPr/>
+        </p:nvSpPr>
+        <p:spPr>
+          <a:xfrm>
+            <a:off x="7292975" y="25400"/>
+            <a:ext cx="1197610" cy="216000"/>
+          </a:xfrm>
+          <a:prstGeom prst="rect">
+            <a:avLst/>
+          </a:prstGeom>
+          <a:solidFill>
+            <a:srgbClr val="A72126"/>
+          </a:solidFill>
+          <a:ln>
+            <a:noFill/>
+          </a:ln>
+        </p:spPr>
+        <p:style>
+          <a:lnRef idx="2">
+            <a:schemeClr val="accent1">
+              <a:shade val="50000"/>
+            </a:schemeClr>
+          </a:lnRef>
+          <a:fillRef idx="1">
+            <a:schemeClr val="accent1"/>
+          </a:fillRef>
+          <a:effectRef idx="0">
+            <a:schemeClr val="accent1"/>
+          </a:effectRef>
+          <a:fontRef idx="minor">
+            <a:schemeClr val="lt1"/>
+          </a:fontRef>
+        </p:style>
+        <p:txBody>
+          <a:bodyPr vertOverflow="overflow" horzOverflow="overflow" vert="horz" wrap="square" numCol="1" spcCol="0" rtlCol="0" fromWordArt="0" anchor="ctr" anchorCtr="0" forceAA="0" compatLnSpc="1">
+            <a:noAutofit/>
+          </a:bodyPr>
+          <a:lstStyle/>
+          <a:p>
+            <a:pPr lvl="0" algn="ctr">
+              <a:buClrTx/>
+              <a:buSzTx/>
+              <a:buFontTx/>
+            </a:pPr>
+            <a:r>
+              <a:rPr lang="zh-CN" altLang="en-US" sz="1200" b="1">
+                <a:solidFill>
+                  <a:schemeClr val="tx2"/>
+                </a:solidFill>
+                <a:latin typeface="微软雅黑" panose="020B0503020204020204" pitchFamily="34" charset="-122"/>
+                <a:ea typeface="微软雅黑" panose="020B0503020204020204" pitchFamily="34" charset="-122"/>
+                <a:sym typeface="+mn-ea"/>
+              </a:rPr>
+              <a:t>Keynote分析</a:t>
+            </a:r>
+          </a:p>
+        </p:txBody>
+      </p:sp>
+      <p:sp>
+        <p:nvSpPr>
+          <p:cNvPr id="19" name="矩形 18"/>
+          <p:cNvSpPr/>
+          <p:nvPr/>
+        </p:nvSpPr>
+        <p:spPr>
+          <a:xfrm>
+            <a:off x="8489315" y="25400"/>
+            <a:ext cx="1197610" cy="216000"/>
+          </a:xfrm>
+          <a:prstGeom prst="rect">
+            <a:avLst/>
+          </a:prstGeom>
+          <a:solidFill>
+            <a:srgbClr val="B0B0B0"/>
+          </a:solidFill>
+          <a:ln>
+            <a:noFill/>
+          </a:ln>
+        </p:spPr>
+        <p:style>
+          <a:lnRef idx="2">
+            <a:schemeClr val="accent1">
+              <a:shade val="50000"/>
+            </a:schemeClr>
+          </a:lnRef>
+          <a:fillRef idx="1">
+            <a:schemeClr val="accent1"/>
+          </a:fillRef>
+          <a:effectRef idx="0">
+            <a:schemeClr val="accent1"/>
+          </a:effectRef>
+          <a:fontRef idx="minor">
+            <a:schemeClr val="lt1"/>
+          </a:fontRef>
+        </p:style>
+        <p:txBody>
+          <a:bodyPr rtlCol="0" anchor="ctr"/>
+          <a:lstStyle/>
+          <a:p>
+            <a:pPr algn="ctr"/>
+            <a:r>
+              <a:rPr lang="zh-CN" altLang="en-US" sz="1200" b="1">
+                <a:solidFill>
+                  <a:schemeClr val="tx2"/>
+                </a:solidFill>
+                <a:latin typeface="微软雅黑" panose="020B0503020204020204" pitchFamily="34" charset="-122"/>
+                <a:ea typeface="微软雅黑" panose="020B0503020204020204" pitchFamily="34" charset="-122"/>
+              </a:rPr>
+              <a:t>会议主题分析</a:t>
+            </a:r>
+          </a:p>
+        </p:txBody>
+      </p:sp>
+      <p:sp>
+        <p:nvSpPr>
+          <p:cNvPr id="31" name="矩形 30"/>
+          <p:cNvSpPr/>
+          <p:nvPr/>
+        </p:nvSpPr>
+        <p:spPr>
+          <a:xfrm>
+            <a:off x="9681845" y="25400"/>
+            <a:ext cx="1197610" cy="216000"/>
+          </a:xfrm>
+          <a:prstGeom prst="rect">
+            <a:avLst/>
+          </a:prstGeom>
+          <a:solidFill>
+            <a:srgbClr val="B0B0B0"/>
+          </a:solidFill>
+          <a:ln>
+            <a:noFill/>
+          </a:ln>
+        </p:spPr>
+        <p:style>
+          <a:lnRef idx="2">
+            <a:schemeClr val="accent1">
+              <a:shade val="50000"/>
+            </a:schemeClr>
+          </a:lnRef>
+          <a:fillRef idx="1">
+            <a:schemeClr val="accent1"/>
+          </a:fillRef>
+          <a:effectRef idx="0">
+            <a:schemeClr val="accent1"/>
+          </a:effectRef>
+          <a:fontRef idx="minor">
+            <a:schemeClr val="lt1"/>
+          </a:fontRef>
+        </p:style>
+        <p:txBody>
+          <a:bodyPr rtlCol="0" anchor="ctr"/>
+          <a:lstStyle/>
+          <a:p>
+            <a:pPr algn="ctr"/>
+            <a:r>
+              <a:rPr lang="zh-CN" altLang="en-US" sz="1200" b="1">
+                <a:solidFill>
+                  <a:schemeClr val="tx2"/>
+                </a:solidFill>
+                <a:latin typeface="微软雅黑" panose="020B0503020204020204" pitchFamily="34" charset="-122"/>
+                <a:ea typeface="微软雅黑" panose="020B0503020204020204" pitchFamily="34" charset="-122"/>
+              </a:rPr>
+              <a:t>优秀论文分析</a:t>
+            </a:r>
+          </a:p>
+        </p:txBody>
+      </p:sp>
+      <p:sp>
+        <p:nvSpPr>
+          <p:cNvPr id="35" name="矩形 34"/>
+          <p:cNvSpPr/>
+          <p:nvPr/>
+        </p:nvSpPr>
+        <p:spPr>
+          <a:xfrm>
+            <a:off x="10881360" y="25400"/>
+            <a:ext cx="1197610" cy="216000"/>
+          </a:xfrm>
+          <a:prstGeom prst="rect">
+            <a:avLst/>
+          </a:prstGeom>
+          <a:solidFill>
+            <a:srgbClr val="B0B0B0"/>
+          </a:solidFill>
+          <a:ln>
+            <a:noFill/>
+          </a:ln>
+        </p:spPr>
+        <p:style>
+          <a:lnRef idx="2">
+            <a:schemeClr val="accent1">
+              <a:shade val="50000"/>
+            </a:schemeClr>
+          </a:lnRef>
+          <a:fillRef idx="1">
+            <a:schemeClr val="accent1"/>
+          </a:fillRef>
+          <a:effectRef idx="0">
+            <a:schemeClr val="accent1"/>
+          </a:effectRef>
+          <a:fontRef idx="minor">
+            <a:schemeClr val="lt1"/>
+          </a:fontRef>
+        </p:style>
+        <p:txBody>
+          <a:bodyPr rtlCol="0" anchor="ctr"/>
+          <a:lstStyle/>
+          <a:p>
+            <a:pPr algn="ctr"/>
+            <a:r>
+              <a:rPr lang="zh-CN" altLang="en-US" sz="1200" b="1">
+                <a:solidFill>
+                  <a:schemeClr val="tx2"/>
+                </a:solidFill>
+                <a:latin typeface="微软雅黑" panose="020B0503020204020204" pitchFamily="34" charset="-122"/>
+                <a:ea typeface="微软雅黑" panose="020B0503020204020204" pitchFamily="34" charset="-122"/>
+              </a:rPr>
+              <a:t>总结</a:t>
             </a:r>
           </a:p>
         </p:txBody>
@@ -8139,7 +8805,7 @@
         <p:spPr>
           <a:xfrm>
             <a:off x="497840" y="2399030"/>
-            <a:ext cx="9828000" cy="602615"/>
+            <a:ext cx="11295380" cy="602615"/>
           </a:xfrm>
           <a:prstGeom prst="rect">
             <a:avLst/>
@@ -8193,24 +8859,31 @@
       </p:sp>
       <p:sp>
         <p:nvSpPr>
-          <p:cNvPr id="22" name="矩形 21"/>
+          <p:cNvPr id="24" name="矩形 23"/>
           <p:cNvSpPr/>
           <p:nvPr/>
         </p:nvSpPr>
         <p:spPr>
           <a:xfrm>
-            <a:off x="420128" y="3184790"/>
-            <a:ext cx="11453375" cy="782216"/>
+            <a:off x="497840" y="3307080"/>
+            <a:ext cx="11295380" cy="539750"/>
           </a:xfrm>
           <a:prstGeom prst="rect">
             <a:avLst/>
           </a:prstGeom>
           <a:noFill/>
           <a:ln>
-            <a:solidFill>
-              <a:srgbClr val="2B632C"/>
-            </a:solidFill>
+            <a:noFill/>
           </a:ln>
+          <a:extLst>
+            <a:ext uri="{909E8E84-426E-40DD-AFC4-6F175D3DCCD1}">
+              <a14:hiddenFill xmlns:a14="http://schemas.microsoft.com/office/drawing/2010/main">
+                <a:solidFill>
+                  <a:schemeClr val="tx2"/>
+                </a:solidFill>
+              </a14:hiddenFill>
+            </a:ext>
+          </a:extLst>
         </p:spPr>
         <p:style>
           <a:lnRef idx="2">
@@ -8229,38 +8902,49 @@
           </a:fontRef>
         </p:style>
         <p:txBody>
-          <a:bodyPr rtlCol="0" anchor="ctr"/>
+          <a:bodyPr rtlCol="0" anchor="t" anchorCtr="0"/>
           <a:lstStyle/>
           <a:p>
-            <a:pPr algn="ctr"/>
-            <a:endParaRPr kumimoji="1" lang="zh-CN" altLang="en-US">
-              <a:solidFill>
-                <a:schemeClr val="tx1"/>
-              </a:solidFill>
-            </a:endParaRPr>
-          </a:p>
-        </p:txBody>
-      </p:sp>
-      <p:sp>
-        <p:nvSpPr>
-          <p:cNvPr id="23" name="矩形 22"/>
+            <a:r>
+              <a:rPr kumimoji="1" lang="en-US" altLang="zh-CN" sz="1200" dirty="0" err="1">
+                <a:solidFill>
+                  <a:schemeClr val="tx1"/>
+                </a:solidFill>
+                <a:latin typeface="微软雅黑" panose="020B0503020204020204" pitchFamily="34" charset="-122"/>
+                <a:ea typeface="微软雅黑" panose="020B0503020204020204" pitchFamily="34" charset="-122"/>
+              </a:rPr>
+              <a:t>keynote_objective</a:t>
+            </a:r>
+          </a:p>
+        </p:txBody>
+      </p:sp>
+      <p:sp>
+        <p:nvSpPr>
+          <p:cNvPr id="27" name="矩形 26"/>
           <p:cNvSpPr/>
           <p:nvPr/>
         </p:nvSpPr>
         <p:spPr>
           <a:xfrm>
-            <a:off x="6024092" y="3099172"/>
-            <a:ext cx="743738" cy="248669"/>
+            <a:off x="497840" y="4212590"/>
+            <a:ext cx="11294745" cy="539750"/>
           </a:xfrm>
           <a:prstGeom prst="rect">
             <a:avLst/>
           </a:prstGeom>
-          <a:solidFill>
-            <a:schemeClr val="tx2"/>
-          </a:solidFill>
+          <a:noFill/>
           <a:ln>
             <a:noFill/>
           </a:ln>
+          <a:extLst>
+            <a:ext uri="{909E8E84-426E-40DD-AFC4-6F175D3DCCD1}">
+              <a14:hiddenFill xmlns:a14="http://schemas.microsoft.com/office/drawing/2010/main">
+                <a:solidFill>
+                  <a:schemeClr val="tx2"/>
+                </a:solidFill>
+              </a14:hiddenFill>
+            </a:ext>
+          </a:extLst>
         </p:spPr>
         <p:style>
           <a:lnRef idx="2">
@@ -8279,50 +8963,42 @@
           </a:fontRef>
         </p:style>
         <p:txBody>
-          <a:bodyPr rtlCol="0" anchor="ctr"/>
+          <a:bodyPr rtlCol="0" anchor="t" anchorCtr="0"/>
           <a:lstStyle/>
           <a:p>
-            <a:pPr algn="ctr"/>
-            <a:r>
-              <a:rPr kumimoji="1" lang="en-US" altLang="zh-CN" sz="1200" b="1" dirty="0">
-                <a:solidFill>
-                  <a:schemeClr val="tx1"/>
-                </a:solidFill>
-                <a:latin typeface="微软雅黑" panose="020B0503020204020204" pitchFamily="34" charset="-122"/>
-                <a:ea typeface="微软雅黑" panose="020B0503020204020204" pitchFamily="34" charset="-122"/>
-              </a:rPr>
-              <a:t>What</a:t>
-            </a:r>
-          </a:p>
-        </p:txBody>
-      </p:sp>
-      <p:sp>
-        <p:nvSpPr>
-          <p:cNvPr id="24" name="矩形 23"/>
+            <a:r>
+              <a:rPr kumimoji="1" lang="en-US" altLang="zh-CN" sz="1200" dirty="0" err="1">
+                <a:solidFill>
+                  <a:schemeClr val="tx1"/>
+                </a:solidFill>
+                <a:latin typeface="微软雅黑" panose="020B0503020204020204" pitchFamily="34" charset="-122"/>
+                <a:ea typeface="微软雅黑" panose="020B0503020204020204" pitchFamily="34" charset="-122"/>
+              </a:rPr>
+              <a:t>keynote_method</a:t>
+            </a:r>
+          </a:p>
+        </p:txBody>
+      </p:sp>
+      <p:sp>
+        <p:nvSpPr>
+          <p:cNvPr id="5" name="矩形 4"/>
           <p:cNvSpPr/>
           <p:nvPr/>
         </p:nvSpPr>
         <p:spPr>
           <a:xfrm>
-            <a:off x="497840" y="3307080"/>
-            <a:ext cx="11295380" cy="539750"/>
+            <a:off x="420370" y="1659890"/>
+            <a:ext cx="9787890" cy="561340"/>
           </a:xfrm>
           <a:prstGeom prst="rect">
             <a:avLst/>
           </a:prstGeom>
-          <a:noFill/>
+          <a:solidFill>
+            <a:schemeClr val="tx2"/>
+          </a:solidFill>
           <a:ln>
             <a:noFill/>
           </a:ln>
-          <a:extLst>
-            <a:ext uri="{909E8E84-426E-40DD-AFC4-6F175D3DCCD1}">
-              <a14:hiddenFill xmlns:a14="http://schemas.microsoft.com/office/drawing/2010/main">
-                <a:solidFill>
-                  <a:schemeClr val="tx2"/>
-                </a:solidFill>
-              </a14:hiddenFill>
-            </a:ext>
-          </a:extLst>
         </p:spPr>
         <p:style>
           <a:lnRef idx="2">
@@ -8352,683 +9028,7 @@
                 <a:latin typeface="微软雅黑" panose="020B0503020204020204" pitchFamily="34" charset="-122"/>
                 <a:ea typeface="微软雅黑" panose="020B0503020204020204" pitchFamily="34" charset="-122"/>
               </a:rPr>
-              <a:t>keynote_objective</a:t>
-            </a:r>
-          </a:p>
-        </p:txBody>
-      </p:sp>
-      <p:sp>
-        <p:nvSpPr>
-          <p:cNvPr id="25" name="矩形 24"/>
-          <p:cNvSpPr/>
-          <p:nvPr/>
-        </p:nvSpPr>
-        <p:spPr>
-          <a:xfrm>
-            <a:off x="420129" y="4089941"/>
-            <a:ext cx="11453374" cy="782216"/>
-          </a:xfrm>
-          <a:prstGeom prst="rect">
-            <a:avLst/>
-          </a:prstGeom>
-          <a:noFill/>
-          <a:ln>
-            <a:solidFill>
-              <a:srgbClr val="2B632C"/>
-            </a:solidFill>
-          </a:ln>
-        </p:spPr>
-        <p:style>
-          <a:lnRef idx="2">
-            <a:schemeClr val="accent1">
-              <a:shade val="50000"/>
-            </a:schemeClr>
-          </a:lnRef>
-          <a:fillRef idx="1">
-            <a:schemeClr val="accent1"/>
-          </a:fillRef>
-          <a:effectRef idx="0">
-            <a:schemeClr val="accent1"/>
-          </a:effectRef>
-          <a:fontRef idx="minor">
-            <a:schemeClr val="lt1"/>
-          </a:fontRef>
-        </p:style>
-        <p:txBody>
-          <a:bodyPr rtlCol="0" anchor="ctr"/>
-          <a:lstStyle/>
-          <a:p>
-            <a:pPr algn="ctr"/>
-            <a:endParaRPr kumimoji="1" lang="zh-CN" altLang="en-US">
-              <a:solidFill>
-                <a:schemeClr val="tx1"/>
-              </a:solidFill>
-            </a:endParaRPr>
-          </a:p>
-        </p:txBody>
-      </p:sp>
-      <p:sp>
-        <p:nvSpPr>
-          <p:cNvPr id="26" name="矩形 25"/>
-          <p:cNvSpPr/>
-          <p:nvPr/>
-        </p:nvSpPr>
-        <p:spPr>
-          <a:xfrm>
-            <a:off x="6024092" y="3994163"/>
-            <a:ext cx="743738" cy="248669"/>
-          </a:xfrm>
-          <a:prstGeom prst="rect">
-            <a:avLst/>
-          </a:prstGeom>
-          <a:solidFill>
-            <a:schemeClr val="tx2"/>
-          </a:solidFill>
-          <a:ln>
-            <a:noFill/>
-          </a:ln>
-        </p:spPr>
-        <p:style>
-          <a:lnRef idx="2">
-            <a:schemeClr val="accent1">
-              <a:shade val="50000"/>
-            </a:schemeClr>
-          </a:lnRef>
-          <a:fillRef idx="1">
-            <a:schemeClr val="accent1"/>
-          </a:fillRef>
-          <a:effectRef idx="0">
-            <a:schemeClr val="accent1"/>
-          </a:effectRef>
-          <a:fontRef idx="minor">
-            <a:schemeClr val="lt1"/>
-          </a:fontRef>
-        </p:style>
-        <p:txBody>
-          <a:bodyPr rtlCol="0" anchor="ctr"/>
-          <a:lstStyle/>
-          <a:p>
-            <a:pPr algn="ctr"/>
-            <a:r>
-              <a:rPr kumimoji="1" lang="en-US" altLang="zh-CN" sz="1200" b="1" dirty="0">
-                <a:solidFill>
-                  <a:schemeClr val="tx1"/>
-                </a:solidFill>
-                <a:latin typeface="微软雅黑" panose="020B0503020204020204" pitchFamily="34" charset="-122"/>
-                <a:ea typeface="微软雅黑" panose="020B0503020204020204" pitchFamily="34" charset="-122"/>
-              </a:rPr>
-              <a:t>How</a:t>
-            </a:r>
-          </a:p>
-        </p:txBody>
-      </p:sp>
-      <p:sp>
-        <p:nvSpPr>
-          <p:cNvPr id="27" name="矩形 26"/>
-          <p:cNvSpPr/>
-          <p:nvPr/>
-        </p:nvSpPr>
-        <p:spPr>
-          <a:xfrm>
-            <a:off x="497840" y="4212590"/>
-            <a:ext cx="11294745" cy="539750"/>
-          </a:xfrm>
-          <a:prstGeom prst="rect">
-            <a:avLst/>
-          </a:prstGeom>
-          <a:noFill/>
-          <a:ln>
-            <a:noFill/>
-          </a:ln>
-          <a:extLst>
-            <a:ext uri="{909E8E84-426E-40DD-AFC4-6F175D3DCCD1}">
-              <a14:hiddenFill xmlns:a14="http://schemas.microsoft.com/office/drawing/2010/main">
-                <a:solidFill>
-                  <a:schemeClr val="tx2"/>
-                </a:solidFill>
-              </a14:hiddenFill>
-            </a:ext>
-          </a:extLst>
-        </p:spPr>
-        <p:style>
-          <a:lnRef idx="2">
-            <a:schemeClr val="accent1">
-              <a:shade val="50000"/>
-            </a:schemeClr>
-          </a:lnRef>
-          <a:fillRef idx="1">
-            <a:schemeClr val="accent1"/>
-          </a:fillRef>
-          <a:effectRef idx="0">
-            <a:schemeClr val="accent1"/>
-          </a:effectRef>
-          <a:fontRef idx="minor">
-            <a:schemeClr val="lt1"/>
-          </a:fontRef>
-        </p:style>
-        <p:txBody>
-          <a:bodyPr rtlCol="0" anchor="t" anchorCtr="0"/>
-          <a:lstStyle/>
-          <a:p>
-            <a:r>
-              <a:rPr kumimoji="1" lang="en-US" altLang="zh-CN" sz="1200" dirty="0" err="1">
-                <a:solidFill>
-                  <a:schemeClr val="tx1"/>
-                </a:solidFill>
-                <a:latin typeface="微软雅黑" panose="020B0503020204020204" pitchFamily="34" charset="-122"/>
-                <a:ea typeface="微软雅黑" panose="020B0503020204020204" pitchFamily="34" charset="-122"/>
-              </a:rPr>
-              <a:t>keynote_method</a:t>
-            </a:r>
-          </a:p>
-        </p:txBody>
-      </p:sp>
-      <p:sp>
-        <p:nvSpPr>
-          <p:cNvPr id="28" name="矩形 27"/>
-          <p:cNvSpPr/>
-          <p:nvPr/>
-        </p:nvSpPr>
-        <p:spPr>
-          <a:xfrm>
-            <a:off x="420130" y="4932994"/>
-            <a:ext cx="2923961" cy="259292"/>
-          </a:xfrm>
-          <a:prstGeom prst="rect">
-            <a:avLst/>
-          </a:prstGeom>
-          <a:noFill/>
-          <a:ln>
-            <a:noFill/>
-          </a:ln>
-        </p:spPr>
-        <p:style>
-          <a:lnRef idx="2">
-            <a:schemeClr val="accent1">
-              <a:shade val="50000"/>
-            </a:schemeClr>
-          </a:lnRef>
-          <a:fillRef idx="1">
-            <a:schemeClr val="accent1"/>
-          </a:fillRef>
-          <a:effectRef idx="0">
-            <a:schemeClr val="accent1"/>
-          </a:effectRef>
-          <a:fontRef idx="minor">
-            <a:schemeClr val="lt1"/>
-          </a:fontRef>
-        </p:style>
-        <p:txBody>
-          <a:bodyPr rtlCol="0" anchor="ctr"/>
-          <a:lstStyle/>
-          <a:p>
-            <a:r>
-              <a:rPr kumimoji="1" lang="zh-CN" altLang="en-US" sz="1400" b="1" dirty="0">
-                <a:solidFill>
-                  <a:schemeClr val="tx1"/>
-                </a:solidFill>
-                <a:latin typeface="微软雅黑" panose="020B0503020204020204" pitchFamily="34" charset="-122"/>
-                <a:ea typeface="微软雅黑" panose="020B0503020204020204" pitchFamily="34" charset="-122"/>
-              </a:rPr>
-              <a:t>业务启发：</a:t>
-            </a:r>
-          </a:p>
-        </p:txBody>
-      </p:sp>
-      <p:sp>
-        <p:nvSpPr>
-          <p:cNvPr id="29" name="矩形 28"/>
-          <p:cNvSpPr/>
-          <p:nvPr/>
-        </p:nvSpPr>
-        <p:spPr>
-          <a:xfrm>
-            <a:off x="414384" y="5181663"/>
-            <a:ext cx="11453374" cy="714679"/>
-          </a:xfrm>
-          <a:prstGeom prst="rect">
-            <a:avLst/>
-          </a:prstGeom>
-          <a:solidFill>
-            <a:schemeClr val="tx2"/>
-          </a:solidFill>
-          <a:ln>
-            <a:noFill/>
-          </a:ln>
-        </p:spPr>
-        <p:style>
-          <a:lnRef idx="2">
-            <a:schemeClr val="accent1">
-              <a:shade val="50000"/>
-            </a:schemeClr>
-          </a:lnRef>
-          <a:fillRef idx="1">
-            <a:schemeClr val="accent1"/>
-          </a:fillRef>
-          <a:effectRef idx="0">
-            <a:schemeClr val="accent1"/>
-          </a:effectRef>
-          <a:fontRef idx="minor">
-            <a:schemeClr val="lt1"/>
-          </a:fontRef>
-        </p:style>
-        <p:txBody>
-          <a:bodyPr rtlCol="0" anchor="t" anchorCtr="0"/>
-          <a:lstStyle/>
-          <a:p>
-            <a:r>
-              <a:rPr kumimoji="1" lang="en-US" altLang="zh-CN" sz="1200" dirty="0" err="1">
-                <a:solidFill>
-                  <a:schemeClr val="tx1"/>
-                </a:solidFill>
-                <a:latin typeface="微软雅黑" panose="020B0503020204020204" pitchFamily="34" charset="-122"/>
-                <a:ea typeface="微软雅黑" panose="020B0503020204020204" pitchFamily="34" charset="-122"/>
-              </a:rPr>
-              <a:t>keynote_inspiration</a:t>
-            </a:r>
-          </a:p>
-        </p:txBody>
-      </p:sp>
-      <p:sp>
-        <p:nvSpPr>
-          <p:cNvPr id="30" name="矩形 29"/>
-          <p:cNvSpPr/>
-          <p:nvPr/>
-        </p:nvSpPr>
-        <p:spPr>
-          <a:xfrm>
-            <a:off x="10447020" y="529590"/>
-            <a:ext cx="1440000" cy="1440000"/>
-          </a:xfrm>
-          <a:prstGeom prst="rect">
-            <a:avLst/>
-          </a:prstGeom>
-          <a:solidFill>
-            <a:schemeClr val="tx2"/>
-          </a:solidFill>
-          <a:ln>
-            <a:noFill/>
-          </a:ln>
-        </p:spPr>
-        <p:style>
-          <a:lnRef idx="2">
-            <a:schemeClr val="accent1">
-              <a:shade val="50000"/>
-            </a:schemeClr>
-          </a:lnRef>
-          <a:fillRef idx="1">
-            <a:schemeClr val="accent1"/>
-          </a:fillRef>
-          <a:effectRef idx="0">
-            <a:schemeClr val="accent1"/>
-          </a:effectRef>
-          <a:fontRef idx="minor">
-            <a:schemeClr val="lt1"/>
-          </a:fontRef>
-        </p:style>
-        <p:txBody>
-          <a:bodyPr rtlCol="0" anchor="t" anchorCtr="0"/>
-          <a:lstStyle/>
-          <a:p>
-            <a:r>
-              <a:rPr kumimoji="1" lang="en-US" altLang="zh-CN" sz="1200" dirty="0" err="1">
-                <a:solidFill>
-                  <a:schemeClr val="tx1"/>
-                </a:solidFill>
-                <a:latin typeface="微软雅黑" panose="020B0503020204020204" pitchFamily="34" charset="-122"/>
-                <a:ea typeface="微软雅黑" panose="020B0503020204020204" pitchFamily="34" charset="-122"/>
-              </a:rPr>
-              <a:t>keynote_picture</a:t>
-            </a:r>
-          </a:p>
-        </p:txBody>
-      </p:sp>
-      <p:sp>
-        <p:nvSpPr>
-          <p:cNvPr id="16" name="矩形 15"/>
-          <p:cNvSpPr/>
-          <p:nvPr/>
-        </p:nvSpPr>
-        <p:spPr>
-          <a:xfrm>
-            <a:off x="415290" y="6015990"/>
-            <a:ext cx="11463020" cy="589915"/>
-          </a:xfrm>
-          <a:prstGeom prst="rect">
-            <a:avLst/>
-          </a:prstGeom>
-          <a:solidFill>
-            <a:srgbClr val="78000F"/>
-          </a:solidFill>
-          <a:ln>
-            <a:noFill/>
-          </a:ln>
-        </p:spPr>
-        <p:style>
-          <a:lnRef idx="2">
-            <a:schemeClr val="accent1">
-              <a:shade val="50000"/>
-            </a:schemeClr>
-          </a:lnRef>
-          <a:fillRef idx="1">
-            <a:schemeClr val="accent1"/>
-          </a:fillRef>
-          <a:effectRef idx="0">
-            <a:schemeClr val="accent1"/>
-          </a:effectRef>
-          <a:fontRef idx="minor">
-            <a:schemeClr val="lt1"/>
-          </a:fontRef>
-        </p:style>
-        <p:txBody>
-          <a:bodyPr rtlCol="0" anchor="t" anchorCtr="0"/>
-          <a:lstStyle/>
-          <a:p>
-            <a:r>
-              <a:rPr kumimoji="1" lang="en-US" altLang="zh-CN" sz="1200" dirty="0" err="1">
-                <a:solidFill>
-                  <a:schemeClr val="tx2"/>
-                </a:solidFill>
-                <a:latin typeface="微软雅黑" panose="020B0503020204020204" pitchFamily="34" charset="-122"/>
-                <a:ea typeface="微软雅黑" panose="020B0503020204020204" pitchFamily="34" charset="-122"/>
-              </a:rPr>
-              <a:t>keynote_summary</a:t>
-            </a:r>
-            <a:endParaRPr kumimoji="1" lang="en-US" altLang="zh-CN" sz="1200" dirty="0">
-              <a:solidFill>
-                <a:schemeClr val="tx2"/>
-              </a:solidFill>
-              <a:latin typeface="微软雅黑" panose="020B0503020204020204" pitchFamily="34" charset="-122"/>
-              <a:ea typeface="微软雅黑" panose="020B0503020204020204" pitchFamily="34" charset="-122"/>
-            </a:endParaRPr>
-          </a:p>
-        </p:txBody>
-      </p:sp>
-      <p:sp>
-        <p:nvSpPr>
-          <p:cNvPr id="17" name="矩形 16"/>
-          <p:cNvSpPr/>
-          <p:nvPr/>
-        </p:nvSpPr>
-        <p:spPr>
-          <a:xfrm>
-            <a:off x="6095365" y="25400"/>
-            <a:ext cx="1198800" cy="216000"/>
-          </a:xfrm>
-          <a:prstGeom prst="rect">
-            <a:avLst/>
-          </a:prstGeom>
-          <a:solidFill>
-            <a:srgbClr val="B0B0B0"/>
-          </a:solidFill>
-          <a:ln>
-            <a:noFill/>
-          </a:ln>
-        </p:spPr>
-        <p:style>
-          <a:lnRef idx="2">
-            <a:schemeClr val="accent1">
-              <a:shade val="50000"/>
-            </a:schemeClr>
-          </a:lnRef>
-          <a:fillRef idx="1">
-            <a:schemeClr val="accent1"/>
-          </a:fillRef>
-          <a:effectRef idx="0">
-            <a:schemeClr val="accent1"/>
-          </a:effectRef>
-          <a:fontRef idx="minor">
-            <a:schemeClr val="lt1"/>
-          </a:fontRef>
-        </p:style>
-        <p:txBody>
-          <a:bodyPr vertOverflow="overflow" horzOverflow="overflow" vert="horz" wrap="square" numCol="1" spcCol="0" rtlCol="0" fromWordArt="0" anchor="ctr" anchorCtr="0" forceAA="0" compatLnSpc="1">
-            <a:noAutofit/>
-          </a:bodyPr>
-          <a:lstStyle/>
-          <a:p>
-            <a:pPr lvl="0" algn="ctr">
-              <a:buClrTx/>
-              <a:buSzTx/>
-              <a:buFontTx/>
-            </a:pPr>
-            <a:r>
-              <a:rPr lang="zh-CN" altLang="en-US" sz="1200" b="1">
-                <a:solidFill>
-                  <a:schemeClr val="tx2"/>
-                </a:solidFill>
-                <a:latin typeface="微软雅黑" panose="020B0503020204020204" pitchFamily="34" charset="-122"/>
-                <a:ea typeface="微软雅黑" panose="020B0503020204020204" pitchFamily="34" charset="-122"/>
-                <a:sym typeface="+mn-ea"/>
-              </a:rPr>
-              <a:t>会议概览</a:t>
-            </a:r>
-          </a:p>
-        </p:txBody>
-      </p:sp>
-      <p:sp>
-        <p:nvSpPr>
-          <p:cNvPr id="18" name="矩形 17"/>
-          <p:cNvSpPr/>
-          <p:nvPr/>
-        </p:nvSpPr>
-        <p:spPr>
-          <a:xfrm>
-            <a:off x="7292975" y="25400"/>
-            <a:ext cx="1197610" cy="216000"/>
-          </a:xfrm>
-          <a:prstGeom prst="rect">
-            <a:avLst/>
-          </a:prstGeom>
-          <a:solidFill>
-            <a:srgbClr val="A72126"/>
-          </a:solidFill>
-          <a:ln>
-            <a:noFill/>
-          </a:ln>
-        </p:spPr>
-        <p:style>
-          <a:lnRef idx="2">
-            <a:schemeClr val="accent1">
-              <a:shade val="50000"/>
-            </a:schemeClr>
-          </a:lnRef>
-          <a:fillRef idx="1">
-            <a:schemeClr val="accent1"/>
-          </a:fillRef>
-          <a:effectRef idx="0">
-            <a:schemeClr val="accent1"/>
-          </a:effectRef>
-          <a:fontRef idx="minor">
-            <a:schemeClr val="lt1"/>
-          </a:fontRef>
-        </p:style>
-        <p:txBody>
-          <a:bodyPr vertOverflow="overflow" horzOverflow="overflow" vert="horz" wrap="square" numCol="1" spcCol="0" rtlCol="0" fromWordArt="0" anchor="ctr" anchorCtr="0" forceAA="0" compatLnSpc="1">
-            <a:noAutofit/>
-          </a:bodyPr>
-          <a:lstStyle/>
-          <a:p>
-            <a:pPr lvl="0" algn="ctr">
-              <a:buClrTx/>
-              <a:buSzTx/>
-              <a:buFontTx/>
-            </a:pPr>
-            <a:r>
-              <a:rPr lang="zh-CN" altLang="en-US" sz="1200" b="1">
-                <a:solidFill>
-                  <a:schemeClr val="tx2"/>
-                </a:solidFill>
-                <a:latin typeface="微软雅黑" panose="020B0503020204020204" pitchFamily="34" charset="-122"/>
-                <a:ea typeface="微软雅黑" panose="020B0503020204020204" pitchFamily="34" charset="-122"/>
-                <a:sym typeface="+mn-ea"/>
-              </a:rPr>
-              <a:t>Keynote分析</a:t>
-            </a:r>
-          </a:p>
-        </p:txBody>
-      </p:sp>
-      <p:sp>
-        <p:nvSpPr>
-          <p:cNvPr id="19" name="矩形 18"/>
-          <p:cNvSpPr/>
-          <p:nvPr/>
-        </p:nvSpPr>
-        <p:spPr>
-          <a:xfrm>
-            <a:off x="8489315" y="25400"/>
-            <a:ext cx="1197610" cy="216000"/>
-          </a:xfrm>
-          <a:prstGeom prst="rect">
-            <a:avLst/>
-          </a:prstGeom>
-          <a:solidFill>
-            <a:srgbClr val="B0B0B0"/>
-          </a:solidFill>
-          <a:ln>
-            <a:noFill/>
-          </a:ln>
-        </p:spPr>
-        <p:style>
-          <a:lnRef idx="2">
-            <a:schemeClr val="accent1">
-              <a:shade val="50000"/>
-            </a:schemeClr>
-          </a:lnRef>
-          <a:fillRef idx="1">
-            <a:schemeClr val="accent1"/>
-          </a:fillRef>
-          <a:effectRef idx="0">
-            <a:schemeClr val="accent1"/>
-          </a:effectRef>
-          <a:fontRef idx="minor">
-            <a:schemeClr val="lt1"/>
-          </a:fontRef>
-        </p:style>
-        <p:txBody>
-          <a:bodyPr rtlCol="0" anchor="ctr"/>
-          <a:lstStyle/>
-          <a:p>
-            <a:pPr algn="ctr"/>
-            <a:r>
-              <a:rPr lang="zh-CN" altLang="en-US" sz="1200" b="1">
-                <a:solidFill>
-                  <a:schemeClr val="tx2"/>
-                </a:solidFill>
-                <a:latin typeface="微软雅黑" panose="020B0503020204020204" pitchFamily="34" charset="-122"/>
-                <a:ea typeface="微软雅黑" panose="020B0503020204020204" pitchFamily="34" charset="-122"/>
-              </a:rPr>
-              <a:t>会议主题分析</a:t>
-            </a:r>
-          </a:p>
-        </p:txBody>
-      </p:sp>
-      <p:sp>
-        <p:nvSpPr>
-          <p:cNvPr id="31" name="矩形 30"/>
-          <p:cNvSpPr/>
-          <p:nvPr/>
-        </p:nvSpPr>
-        <p:spPr>
-          <a:xfrm>
-            <a:off x="9681845" y="25400"/>
-            <a:ext cx="1197610" cy="216000"/>
-          </a:xfrm>
-          <a:prstGeom prst="rect">
-            <a:avLst/>
-          </a:prstGeom>
-          <a:solidFill>
-            <a:srgbClr val="B0B0B0"/>
-          </a:solidFill>
-          <a:ln>
-            <a:noFill/>
-          </a:ln>
-        </p:spPr>
-        <p:style>
-          <a:lnRef idx="2">
-            <a:schemeClr val="accent1">
-              <a:shade val="50000"/>
-            </a:schemeClr>
-          </a:lnRef>
-          <a:fillRef idx="1">
-            <a:schemeClr val="accent1"/>
-          </a:fillRef>
-          <a:effectRef idx="0">
-            <a:schemeClr val="accent1"/>
-          </a:effectRef>
-          <a:fontRef idx="minor">
-            <a:schemeClr val="lt1"/>
-          </a:fontRef>
-        </p:style>
-        <p:txBody>
-          <a:bodyPr rtlCol="0" anchor="ctr"/>
-          <a:lstStyle/>
-          <a:p>
-            <a:pPr algn="ctr"/>
-            <a:r>
-              <a:rPr lang="zh-CN" altLang="en-US" sz="1200" b="1">
-                <a:solidFill>
-                  <a:schemeClr val="tx2"/>
-                </a:solidFill>
-                <a:latin typeface="微软雅黑" panose="020B0503020204020204" pitchFamily="34" charset="-122"/>
-                <a:ea typeface="微软雅黑" panose="020B0503020204020204" pitchFamily="34" charset="-122"/>
-              </a:rPr>
-              <a:t>优秀论文分析</a:t>
-            </a:r>
-          </a:p>
-        </p:txBody>
-      </p:sp>
-      <p:sp>
-        <p:nvSpPr>
-          <p:cNvPr id="35" name="矩形 34"/>
-          <p:cNvSpPr/>
-          <p:nvPr/>
-        </p:nvSpPr>
-        <p:spPr>
-          <a:xfrm>
-            <a:off x="10881360" y="25400"/>
-            <a:ext cx="1197610" cy="216000"/>
-          </a:xfrm>
-          <a:prstGeom prst="rect">
-            <a:avLst/>
-          </a:prstGeom>
-          <a:solidFill>
-            <a:srgbClr val="B0B0B0"/>
-          </a:solidFill>
-          <a:ln>
-            <a:noFill/>
-          </a:ln>
-        </p:spPr>
-        <p:style>
-          <a:lnRef idx="2">
-            <a:schemeClr val="accent1">
-              <a:shade val="50000"/>
-            </a:schemeClr>
-          </a:lnRef>
-          <a:fillRef idx="1">
-            <a:schemeClr val="accent1"/>
-          </a:fillRef>
-          <a:effectRef idx="0">
-            <a:schemeClr val="accent1"/>
-          </a:effectRef>
-          <a:fontRef idx="minor">
-            <a:schemeClr val="lt1"/>
-          </a:fontRef>
-        </p:style>
-        <p:txBody>
-          <a:bodyPr rtlCol="0" anchor="ctr"/>
-          <a:lstStyle/>
-          <a:p>
-            <a:pPr algn="ctr"/>
-            <a:r>
-              <a:rPr lang="zh-CN" altLang="en-US" sz="1200" b="1">
-                <a:solidFill>
-                  <a:schemeClr val="tx2"/>
-                </a:solidFill>
-                <a:latin typeface="微软雅黑" panose="020B0503020204020204" pitchFamily="34" charset="-122"/>
-                <a:ea typeface="微软雅黑" panose="020B0503020204020204" pitchFamily="34" charset="-122"/>
-              </a:rPr>
-              <a:t>总结</a:t>
+              <a:t>keynote_abstract</a:t>
             </a:r>
           </a:p>
         </p:txBody>
@@ -19664,7 +19664,7 @@
                 <a:latin typeface="微软雅黑" panose="020B0503020204020204" pitchFamily="34" charset="-122"/>
                 <a:ea typeface="微软雅黑" panose="020B0503020204020204" pitchFamily="34" charset="-122"/>
               </a:rPr>
-              <a:t>compony_school_analysis_png</a:t>
+              <a:t>company_school_analysis_png</a:t>
             </a:r>
             <a:endParaRPr lang="en-GB" altLang="zh-CN" sz="1400" dirty="0">
               <a:solidFill>
@@ -20462,7 +20462,7 @@
                 <a:latin typeface="微软雅黑" panose="020B0503020204020204" pitchFamily="34" charset="-122"/>
                 <a:ea typeface="微软雅黑" panose="020B0503020204020204" pitchFamily="34" charset="-122"/>
               </a:rPr>
-              <a:t>高校技术优势局者</a:t>
+              <a:t>高校技术优势矩阵</a:t>
             </a:r>
           </a:p>
         </p:txBody>
@@ -20566,6 +20566,26 @@
           <a:lstStyle/>
           <a:p>
             <a:r>
+              <a:rPr lang="en-GB" altLang="zh-CN" sz="1400" dirty="0">
+                <a:solidFill>
+                  <a:srgbClr val="FF0000"/>
+                </a:solidFill>
+                <a:latin typeface="微软雅黑" panose="020B0503020204020204" pitchFamily="34" charset="-122"/>
+                <a:ea typeface="微软雅黑" panose="020B0503020204020204" pitchFamily="34" charset="-122"/>
+              </a:rPr>
+              <a:t>comp</a:t>
+            </a:r>
+            <a:r>
+              <a:rPr lang="en-US" altLang="zh-CN" sz="1400" dirty="0">
+                <a:solidFill>
+                  <a:srgbClr val="FF0000"/>
+                </a:solidFill>
+                <a:latin typeface="微软雅黑" panose="020B0503020204020204" pitchFamily="34" charset="-122"/>
+                <a:ea typeface="微软雅黑" panose="020B0503020204020204" pitchFamily="34" charset="-122"/>
+              </a:rPr>
+              <a:t>a</a:t>
+            </a:r>
+            <a:r>
               <a:rPr lang="en-GB" altLang="zh-CN" sz="1400" dirty="0" err="1">
                 <a:solidFill>
                   <a:srgbClr val="FF0000"/>
@@ -20573,7 +20593,7 @@
                 <a:latin typeface="微软雅黑" panose="020B0503020204020204" pitchFamily="34" charset="-122"/>
                 <a:ea typeface="微软雅黑" panose="020B0503020204020204" pitchFamily="34" charset="-122"/>
               </a:rPr>
-              <a:t>compony_school_analysis_png</a:t>
+              <a:t>ny_tech_strength_csv</a:t>
             </a:r>
             <a:endParaRPr lang="en-GB" altLang="zh-CN" sz="1400" dirty="0">
               <a:solidFill>
@@ -20583,15 +20603,6 @@
               <a:ea typeface="微软雅黑" panose="020B0503020204020204" pitchFamily="34" charset="-122"/>
             </a:endParaRPr>
           </a:p>
-          <a:p>
-            <a:endParaRPr lang="en-GB" altLang="zh-CN" sz="1400" dirty="0">
-              <a:solidFill>
-                <a:srgbClr val="FF0000"/>
-              </a:solidFill>
-              <a:latin typeface="微软雅黑" panose="020B0503020204020204" pitchFamily="34" charset="-122"/>
-              <a:ea typeface="微软雅黑" panose="020B0503020204020204" pitchFamily="34" charset="-122"/>
-            </a:endParaRPr>
-          </a:p>
         </p:txBody>
       </p:sp>
       <p:sp>
@@ -20641,7 +20652,7 @@
                 <a:latin typeface="微软雅黑" panose="020B0503020204020204" pitchFamily="34" charset="-122"/>
                 <a:ea typeface="微软雅黑" panose="020B0503020204020204" pitchFamily="34" charset="-122"/>
               </a:rPr>
-              <a:t>企业技术优势局者</a:t>
+              <a:t>企业技术优势矩阵</a:t>
             </a:r>
           </a:p>
         </p:txBody>

--- a/templates/conference_template.pptx
+++ b/templates/conference_template.pptx
@@ -130,43 +130,6 @@
     </a:lvl9pPr>
   </p:defaultTextStyle>
   <p:extLst>
-    <p:ext uri="{521415D9-36F7-43E2-AB2F-B90AF26B5E84}">
-      <p14:sectionLst xmlns:p14="http://schemas.microsoft.com/office/powerpoint/2010/main">
-        <p14:section name="封面页_图片版" id="{E8D0D622-F6C6-F44A-B365-B4A5FF6195C2}">
-          <p14:sldIdLst>
-            <p14:sldId id="283"/>
-          </p14:sldIdLst>
-        </p14:section>
-        <p14:section name="目录页" id="{9D221634-295C-7843-AF5C-A0CB4F229241}">
-          <p14:sldIdLst>
-            <p14:sldId id="282"/>
-          </p14:sldIdLst>
-        </p14:section>
-        <p14:section name="章节页" id="{FD05EE94-C931-8C4B-83A2-004B32AA1207}">
-          <p14:sldIdLst>
-            <p14:sldId id="281"/>
-            <p14:sldId id="286"/>
-            <p14:sldId id="297"/>
-            <p14:sldId id="298"/>
-            <p14:sldId id="299"/>
-            <p14:sldId id="300"/>
-            <p14:sldId id="301"/>
-            <p14:sldId id="302"/>
-            <p14:sldId id="303"/>
-            <p14:sldId id="291"/>
-            <p14:sldId id="292"/>
-            <p14:sldId id="293"/>
-            <p14:sldId id="294"/>
-            <p14:sldId id="295"/>
-          </p14:sldIdLst>
-        </p14:section>
-        <p14:section name="结束页" id="{3F9D54A7-3BE2-2540-BB4C-DFE5509085F3}">
-          <p14:sldIdLst>
-            <p14:sldId id="280"/>
-          </p14:sldIdLst>
-        </p14:section>
-      </p14:sectionLst>
-    </p:ext>
     <p:ext uri="{EFAFB233-063F-42B5-8137-9DF3F51BA10A}">
       <p15:sldGuideLst xmlns:p15="http://schemas.microsoft.com/office/powerpoint/2012/main">
         <p15:guide id="5" pos="3682" userDrawn="1">
